--- a/site/clases/parte-1-machine-learning-clasico/079-svm-para-regresion/clase-079-svm-para-regresion-presentacion.pptx
+++ b/site/clases/parte-1-machine-learning-clasico/079-svm-para-regresion/clase-079-svm-para-regresion-presentacion.pptx
@@ -3272,7 +3272,7 @@
                 </a:solidFill>
                 <a:latin typeface="Segoe UI"/>
               </a:rPr>
-              <a:t>Parte: 1 — Machine Learning Clásico · Fuente: Géron, cap. 5.  Duración estimada: 50 min.</a:t>
+              <a:t>Parte: 1 — Machine Learning Clásico · Fuente: Géron, cap. 5.  Duración estimada: 50 min. · Nivel: Intermedio</a:t>
             </a:r>
           </a:p>
         </p:txBody>
@@ -3581,7 +3581,7 @@
                 </a:solidFill>
                 <a:latin typeface="Segoe UI"/>
               </a:rPr>
-              <a:t>Parte: 1 — Machine Learning Clásico · Fuente: Géron, cap. 5.  Duración estimada: 50 min.</a:t>
+              <a:t>Parte: 1 — Machine Learning Clásico · Fuente: Géron, cap. 5.  Duración estimada: 50 min. · Nivel: Intermedio</a:t>
             </a:r>
           </a:p>
         </p:txBody>
@@ -4823,7 +4823,7 @@
                 </a:solidFill>
                 <a:latin typeface="Segoe UI"/>
               </a:rPr>
-              <a:t>Primer bloque ejecutable del notebook.</a:t>
+              <a:t>Generamos y = 0.5·x + ruido, entrenamos LinearSVR(epsilon=0.5) y dibujamos la recta con su tubo ±ε. Los puntos fuera del tubo son los vectores soporte.</a:t>
             </a:r>
           </a:p>
         </p:txBody>
@@ -4910,7 +4910,387 @@
                 </a:solidFill>
                 <a:latin typeface="Courier New"/>
               </a:rPr>
-              <a:t># Imports y configuración inicial</a:t>
+              <a:t>import numpy as np</a:t>
+            </a:r>
+          </a:p>
+          <a:p>
+            <a:pPr>
+              <a:defRPr sz="1200" b="0">
+                <a:solidFill>
+                  <a:srgbClr val="F8FAFC"/>
+                </a:solidFill>
+                <a:latin typeface="Courier New"/>
+              </a:defRPr>
+            </a:pPr>
+            <a:r>
+              <a:rPr sz="1200" b="0">
+                <a:solidFill>
+                  <a:srgbClr val="F8FAFC"/>
+                </a:solidFill>
+                <a:latin typeface="Courier New"/>
+              </a:rPr>
+              <a:t>import matplotlib.pyplot as plt</a:t>
+            </a:r>
+          </a:p>
+          <a:p>
+            <a:pPr>
+              <a:defRPr sz="1200" b="0">
+                <a:solidFill>
+                  <a:srgbClr val="F8FAFC"/>
+                </a:solidFill>
+                <a:latin typeface="Courier New"/>
+              </a:defRPr>
+            </a:pPr>
+            <a:r>
+              <a:rPr sz="1200" b="0">
+                <a:solidFill>
+                  <a:srgbClr val="F8FAFC"/>
+                </a:solidFill>
+                <a:latin typeface="Courier New"/>
+              </a:rPr>
+              <a:t>from sklearn.svm import LinearSVR, SVR</a:t>
+            </a:r>
+          </a:p>
+          <a:p>
+            <a:pPr>
+              <a:defRPr sz="1200" b="0">
+                <a:solidFill>
+                  <a:srgbClr val="F8FAFC"/>
+                </a:solidFill>
+                <a:latin typeface="Courier New"/>
+              </a:defRPr>
+            </a:pPr>
+            <a:r>
+              <a:rPr sz="1200" b="0">
+                <a:solidFill>
+                  <a:srgbClr val="F8FAFC"/>
+                </a:solidFill>
+                <a:latin typeface="Courier New"/>
+              </a:rPr>
+              <a:t>from sklearn.linear_model import LinearRegression, Ridge</a:t>
+            </a:r>
+          </a:p>
+          <a:p>
+            <a:pPr>
+              <a:defRPr sz="1200" b="0">
+                <a:solidFill>
+                  <a:srgbClr val="F8FAFC"/>
+                </a:solidFill>
+                <a:latin typeface="Courier New"/>
+              </a:defRPr>
+            </a:pPr>
+            <a:r>
+              <a:rPr sz="1200" b="0">
+                <a:solidFill>
+                  <a:srgbClr val="F8FAFC"/>
+                </a:solidFill>
+                <a:latin typeface="Courier New"/>
+              </a:rPr>
+              <a:t>from sklearn.preprocessing import StandardScaler</a:t>
+            </a:r>
+          </a:p>
+          <a:p>
+            <a:pPr>
+              <a:defRPr sz="1200" b="0">
+                <a:solidFill>
+                  <a:srgbClr val="F8FAFC"/>
+                </a:solidFill>
+                <a:latin typeface="Courier New"/>
+              </a:defRPr>
+            </a:pPr>
+            <a:r>
+              <a:rPr sz="1200" b="0">
+                <a:solidFill>
+                  <a:srgbClr val="F8FAFC"/>
+                </a:solidFill>
+                <a:latin typeface="Courier New"/>
+              </a:rPr>
+              <a:t>from sklearn.pipeline import make_pipeline</a:t>
+            </a:r>
+          </a:p>
+          <a:p>
+            <a:pPr>
+              <a:defRPr sz="1200" b="0">
+                <a:solidFill>
+                  <a:srgbClr val="F8FAFC"/>
+                </a:solidFill>
+                <a:latin typeface="Courier New"/>
+              </a:defRPr>
+            </a:pPr>
+            <a:r>
+              <a:rPr sz="1200" b="0">
+                <a:solidFill>
+                  <a:srgbClr val="F8FAFC"/>
+                </a:solidFill>
+                <a:latin typeface="Courier New"/>
+              </a:rPr>
+              <a:t>from sklearn.model_selection import train_test_split</a:t>
+            </a:r>
+          </a:p>
+          <a:p>
+            <a:pPr>
+              <a:defRPr sz="1200" b="0">
+                <a:solidFill>
+                  <a:srgbClr val="F8FAFC"/>
+                </a:solidFill>
+                <a:latin typeface="Courier New"/>
+              </a:defRPr>
+            </a:pPr>
+            <a:r>
+              <a:rPr sz="1200" b="0">
+                <a:solidFill>
+                  <a:srgbClr val="F8FAFC"/>
+                </a:solidFill>
+                <a:latin typeface="Courier New"/>
+              </a:rPr>
+              <a:t>from sklearn.metrics import mean_squared_error, mean_absolute_error</a:t>
+            </a:r>
+          </a:p>
+          <a:p>
+            <a:pPr>
+              <a:defRPr sz="1200" b="0">
+                <a:solidFill>
+                  <a:srgbClr val="F8FAFC"/>
+                </a:solidFill>
+                <a:latin typeface="Courier New"/>
+              </a:defRPr>
+            </a:pPr>
+            <a:r>
+              <a:rPr sz="1200" b="0">
+                <a:solidFill>
+                  <a:srgbClr val="F8FAFC"/>
+                </a:solidFill>
+                <a:latin typeface="Courier New"/>
+              </a:rPr>
+              <a:t> </a:t>
+            </a:r>
+          </a:p>
+          <a:p>
+            <a:pPr>
+              <a:defRPr sz="1200" b="0">
+                <a:solidFill>
+                  <a:srgbClr val="F8FAFC"/>
+                </a:solidFill>
+                <a:latin typeface="Courier New"/>
+              </a:defRPr>
+            </a:pPr>
+            <a:r>
+              <a:rPr sz="1200" b="0">
+                <a:solidFill>
+                  <a:srgbClr val="F8FAFC"/>
+                </a:solidFill>
+                <a:latin typeface="Courier New"/>
+              </a:rPr>
+              <a:t>RND = 42</a:t>
+            </a:r>
+          </a:p>
+          <a:p>
+            <a:pPr>
+              <a:defRPr sz="1200" b="0">
+                <a:solidFill>
+                  <a:srgbClr val="F8FAFC"/>
+                </a:solidFill>
+                <a:latin typeface="Courier New"/>
+              </a:defRPr>
+            </a:pPr>
+            <a:r>
+              <a:rPr sz="1200" b="0">
+                <a:solidFill>
+                  <a:srgbClr val="F8FAFC"/>
+                </a:solidFill>
+                <a:latin typeface="Courier New"/>
+              </a:rPr>
+              <a:t>rng = np.random.default_rng(RND)</a:t>
+            </a:r>
+          </a:p>
+          <a:p>
+            <a:pPr>
+              <a:defRPr sz="1200" b="0">
+                <a:solidFill>
+                  <a:srgbClr val="F8FAFC"/>
+                </a:solidFill>
+                <a:latin typeface="Courier New"/>
+              </a:defRPr>
+            </a:pPr>
+            <a:r>
+              <a:rPr sz="1200" b="0">
+                <a:solidFill>
+                  <a:srgbClr val="F8FAFC"/>
+                </a:solidFill>
+                <a:latin typeface="Courier New"/>
+              </a:rPr>
+              <a:t>x = np.linspace(0, 5, 120)</a:t>
+            </a:r>
+          </a:p>
+          <a:p>
+            <a:pPr>
+              <a:defRPr sz="1200" b="0">
+                <a:solidFill>
+                  <a:srgbClr val="F8FAFC"/>
+                </a:solidFill>
+                <a:latin typeface="Courier New"/>
+              </a:defRPr>
+            </a:pPr>
+            <a:r>
+              <a:rPr sz="1200" b="0">
+                <a:solidFill>
+                  <a:srgbClr val="F8FAFC"/>
+                </a:solidFill>
+                <a:latin typeface="Courier New"/>
+              </a:rPr>
+              <a:t>y = 0.5 * x + rng.normal(0, 0.4, size=x.size)</a:t>
+            </a:r>
+          </a:p>
+          <a:p>
+            <a:pPr>
+              <a:defRPr sz="1200" b="0">
+                <a:solidFill>
+                  <a:srgbClr val="F8FAFC"/>
+                </a:solidFill>
+                <a:latin typeface="Courier New"/>
+              </a:defRPr>
+            </a:pPr>
+            <a:r>
+              <a:rPr sz="1200" b="0">
+                <a:solidFill>
+                  <a:srgbClr val="F8FAFC"/>
+                </a:solidFill>
+                <a:latin typeface="Courier New"/>
+              </a:rPr>
+              <a:t>X = x.reshape(-1, 1)</a:t>
+            </a:r>
+          </a:p>
+          <a:p>
+            <a:pPr>
+              <a:defRPr sz="1200" b="0">
+                <a:solidFill>
+                  <a:srgbClr val="F8FAFC"/>
+                </a:solidFill>
+                <a:latin typeface="Courier New"/>
+              </a:defRPr>
+            </a:pPr>
+            <a:r>
+              <a:rPr sz="1200" b="0">
+                <a:solidFill>
+                  <a:srgbClr val="F8FAFC"/>
+                </a:solidFill>
+                <a:latin typeface="Courier New"/>
+              </a:rPr>
+              <a:t> </a:t>
+            </a:r>
+          </a:p>
+          <a:p>
+            <a:pPr>
+              <a:defRPr sz="1200" b="0">
+                <a:solidFill>
+                  <a:srgbClr val="F8FAFC"/>
+                </a:solidFill>
+                <a:latin typeface="Courier New"/>
+              </a:defRPr>
+            </a:pPr>
+            <a:r>
+              <a:rPr sz="1200" b="0">
+                <a:solidFill>
+                  <a:srgbClr val="F8FAFC"/>
+                </a:solidFill>
+                <a:latin typeface="Courier New"/>
+              </a:rPr>
+              <a:t>eps = 0.5</a:t>
+            </a:r>
+          </a:p>
+          <a:p>
+            <a:pPr>
+              <a:defRPr sz="1200" b="0">
+                <a:solidFill>
+                  <a:srgbClr val="F8FAFC"/>
+                </a:solidFill>
+                <a:latin typeface="Courier New"/>
+              </a:defRPr>
+            </a:pPr>
+            <a:r>
+              <a:rPr sz="1200" b="0">
+                <a:solidFill>
+                  <a:srgbClr val="F8FAFC"/>
+                </a:solidFill>
+                <a:latin typeface="Courier New"/>
+              </a:rPr>
+              <a:t>svr = LinearSVR(epsilon=eps, C=1.0, max_iter=10000, random_state=RND).fit(X, y)</a:t>
+            </a:r>
+          </a:p>
+          <a:p>
+            <a:pPr>
+              <a:defRPr sz="1200" b="0">
+                <a:solidFill>
+                  <a:srgbClr val="F8FAFC"/>
+                </a:solidFill>
+                <a:latin typeface="Courier New"/>
+              </a:defRPr>
+            </a:pPr>
+            <a:r>
+              <a:rPr sz="1200" b="0">
+                <a:solidFill>
+                  <a:srgbClr val="F8FAFC"/>
+                </a:solidFill>
+                <a:latin typeface="Courier New"/>
+              </a:rPr>
+              <a:t>pred = svr.predict(X)</a:t>
+            </a:r>
+          </a:p>
+          <a:p>
+            <a:pPr>
+              <a:defRPr sz="1200" b="0">
+                <a:solidFill>
+                  <a:srgbClr val="F8FAFC"/>
+                </a:solidFill>
+                <a:latin typeface="Courier New"/>
+              </a:defRPr>
+            </a:pPr>
+            <a:r>
+              <a:rPr sz="1200" b="0">
+                <a:solidFill>
+                  <a:srgbClr val="F8FAFC"/>
+                </a:solidFill>
+                <a:latin typeface="Courier New"/>
+              </a:rPr>
+              <a:t>fuera = np.abs(y - pred) &gt; eps            # vectores soporte aproximados</a:t>
+            </a:r>
+          </a:p>
+          <a:p>
+            <a:pPr>
+              <a:defRPr sz="1200" b="0">
+                <a:solidFill>
+                  <a:srgbClr val="F8FAFC"/>
+                </a:solidFill>
+                <a:latin typeface="Courier New"/>
+              </a:defRPr>
+            </a:pPr>
+            <a:r>
+              <a:rPr sz="1200" b="0">
+                <a:solidFill>
+                  <a:srgbClr val="F8FAFC"/>
+                </a:solidFill>
+                <a:latin typeface="Courier New"/>
+              </a:rPr>
+              <a:t>print(f"puntos fuera del tubo (vectores soporte): {fuera.sum()} de {x.size}")</a:t>
+            </a:r>
+          </a:p>
+          <a:p>
+            <a:pPr>
+              <a:defRPr sz="1200" b="0">
+                <a:solidFill>
+                  <a:srgbClr val="F8FAFC"/>
+                </a:solidFill>
+                <a:latin typeface="Courier New"/>
+              </a:defRPr>
+            </a:pPr>
+            <a:r>
+              <a:rPr sz="1200" b="0">
+                <a:solidFill>
+                  <a:srgbClr val="F8FAFC"/>
+                </a:solidFill>
+                <a:latin typeface="Courier New"/>
+              </a:rPr>
+              <a:t># ... (truncado)</a:t>
             </a:r>
           </a:p>
         </p:txBody>
